--- a/schools-presentations/A Lykeiou/A5 - Computer Networks and Internet/A.5.M1 Εισαγωγή - Μέρος 1.pptx
+++ b/schools-presentations/A Lykeiou/A5 - Computer Networks and Internet/A.5.M1 Εισαγωγή - Μέρος 1.pptx
@@ -130,16 +130,24 @@
   <pc:docChgLst>
     <pc:chgData name="Άριστος Αρέστη" userId="813aa191-2d4c-464f-9d05-0a7e494d859f" providerId="ADAL" clId="{49C7B61D-1ACF-4AFF-A04E-A3B433E32474}"/>
     <pc:docChg chg="undo custSel addSld modSld sldOrd">
-      <pc:chgData name="Άριστος Αρέστη" userId="813aa191-2d4c-464f-9d05-0a7e494d859f" providerId="ADAL" clId="{49C7B61D-1ACF-4AFF-A04E-A3B433E32474}" dt="2026-09-26T18:57:28.573" v="59" actId="1076"/>
+      <pc:chgData name="Άριστος Αρέστη" userId="813aa191-2d4c-464f-9d05-0a7e494d859f" providerId="ADAL" clId="{49C7B61D-1ACF-4AFF-A04E-A3B433E32474}" dt="2026-10-05T14:45:37.789" v="88" actId="20577"/>
       <pc:docMkLst>
         <pc:docMk/>
       </pc:docMkLst>
       <pc:sldChg chg="addSp modSp mod">
-        <pc:chgData name="Άριστος Αρέστη" userId="813aa191-2d4c-464f-9d05-0a7e494d859f" providerId="ADAL" clId="{49C7B61D-1ACF-4AFF-A04E-A3B433E32474}" dt="2026-09-26T18:48:22.891" v="32" actId="1076"/>
+        <pc:chgData name="Άριστος Αρέστη" userId="813aa191-2d4c-464f-9d05-0a7e494d859f" providerId="ADAL" clId="{49C7B61D-1ACF-4AFF-A04E-A3B433E32474}" dt="2026-10-05T14:45:37.789" v="88" actId="20577"/>
         <pc:sldMkLst>
           <pc:docMk/>
           <pc:sldMk cId="2570149264" sldId="259"/>
         </pc:sldMkLst>
+        <pc:spChg chg="mod">
+          <ac:chgData name="Άριστος Αρέστη" userId="813aa191-2d4c-464f-9d05-0a7e494d859f" providerId="ADAL" clId="{49C7B61D-1ACF-4AFF-A04E-A3B433E32474}" dt="2026-10-05T14:45:37.789" v="88" actId="20577"/>
+          <ac:spMkLst>
+            <pc:docMk/>
+            <pc:sldMk cId="2570149264" sldId="259"/>
+            <ac:spMk id="5" creationId="{974704AF-72C2-41DD-947B-A63BB77F11C3}"/>
+          </ac:spMkLst>
+        </pc:spChg>
         <pc:picChg chg="add mod">
           <ac:chgData name="Άριστος Αρέστη" userId="813aa191-2d4c-464f-9d05-0a7e494d859f" providerId="ADAL" clId="{49C7B61D-1ACF-4AFF-A04E-A3B433E32474}" dt="2026-09-26T18:48:20.786" v="31" actId="14100"/>
           <ac:picMkLst>
@@ -250,22 +258,6 @@
             <ac:picMk id="5" creationId="{04FCB596-988B-621F-2159-2320F1F5C38D}"/>
           </ac:picMkLst>
         </pc:picChg>
-        <pc:picChg chg="del">
-          <ac:chgData name="Άριστος Αρέστη" userId="813aa191-2d4c-464f-9d05-0a7e494d859f" providerId="ADAL" clId="{49C7B61D-1ACF-4AFF-A04E-A3B433E32474}" dt="2026-09-26T18:51:54.288" v="33" actId="478"/>
-          <ac:picMkLst>
-            <pc:docMk/>
-            <pc:sldMk cId="1459875993" sldId="261"/>
-            <ac:picMk id="78" creationId="{00000000-0000-0000-0000-000000000000}"/>
-          </ac:picMkLst>
-        </pc:picChg>
-        <pc:picChg chg="del">
-          <ac:chgData name="Άριστος Αρέστη" userId="813aa191-2d4c-464f-9d05-0a7e494d859f" providerId="ADAL" clId="{49C7B61D-1ACF-4AFF-A04E-A3B433E32474}" dt="2026-09-26T18:51:55.226" v="34" actId="478"/>
-          <ac:picMkLst>
-            <pc:docMk/>
-            <pc:sldMk cId="1459875993" sldId="261"/>
-            <ac:picMk id="79" creationId="{00000000-0000-0000-0000-000000000000}"/>
-          </ac:picMkLst>
-        </pc:picChg>
       </pc:sldChg>
       <pc:sldChg chg="addSp delSp modSp mod">
         <pc:chgData name="Άριστος Αρέστη" userId="813aa191-2d4c-464f-9d05-0a7e494d859f" providerId="ADAL" clId="{49C7B61D-1ACF-4AFF-A04E-A3B433E32474}" dt="2026-09-26T18:57:28.573" v="59" actId="1076"/>
@@ -2120,7 +2112,7 @@
           <a:lstStyle/>
           <a:p>
             <a:fld id="{0E1AB97B-D0C7-4CCB-8568-F47C13D538D5}" type="datetimeFigureOut">
-              <a:t>26-Sep-26</a:t>
+              <a:t>05-Oct-26</a:t>
             </a:fld>
             <a:endParaRPr/>
           </a:p>
@@ -2394,7 +2386,7 @@
           <a:lstStyle/>
           <a:p>
             <a:fld id="{0E1AB97B-D0C7-4CCB-8568-F47C13D538D5}" type="datetimeFigureOut">
-              <a:t>26-Sep-26</a:t>
+              <a:t>05-Oct-26</a:t>
             </a:fld>
             <a:endParaRPr/>
           </a:p>
@@ -2738,7 +2730,7 @@
           <a:lstStyle/>
           <a:p>
             <a:fld id="{0E1AB97B-D0C7-4CCB-8568-F47C13D538D5}" type="datetimeFigureOut">
-              <a:t>26-Sep-26</a:t>
+              <a:t>05-Oct-26</a:t>
             </a:fld>
             <a:endParaRPr/>
           </a:p>
@@ -3116,7 +3108,7 @@
           <a:lstStyle/>
           <a:p>
             <a:fld id="{0E1AB97B-D0C7-4CCB-8568-F47C13D538D5}" type="datetimeFigureOut">
-              <a:t>26-Sep-26</a:t>
+              <a:t>05-Oct-26</a:t>
             </a:fld>
             <a:endParaRPr/>
           </a:p>
@@ -3460,7 +3452,7 @@
           <a:lstStyle/>
           <a:p>
             <a:fld id="{0E1AB97B-D0C7-4CCB-8568-F47C13D538D5}" type="datetimeFigureOut">
-              <a:t>26-Sep-26</a:t>
+              <a:t>05-Oct-26</a:t>
             </a:fld>
             <a:endParaRPr/>
           </a:p>
@@ -3905,7 +3897,7 @@
           <a:lstStyle/>
           <a:p>
             <a:fld id="{0E1AB97B-D0C7-4CCB-8568-F47C13D538D5}" type="datetimeFigureOut">
-              <a:t>26-Sep-26</a:t>
+              <a:t>05-Oct-26</a:t>
             </a:fld>
             <a:endParaRPr/>
           </a:p>
@@ -4100,7 +4092,7 @@
           <a:lstStyle/>
           <a:p>
             <a:fld id="{0E1AB97B-D0C7-4CCB-8568-F47C13D538D5}" type="datetimeFigureOut">
-              <a:t>26-Sep-26</a:t>
+              <a:t>05-Oct-26</a:t>
             </a:fld>
             <a:endParaRPr/>
           </a:p>
@@ -4305,7 +4297,7 @@
           <a:lstStyle/>
           <a:p>
             <a:fld id="{0E1AB97B-D0C7-4CCB-8568-F47C13D538D5}" type="datetimeFigureOut">
-              <a:t>26-Sep-26</a:t>
+              <a:t>05-Oct-26</a:t>
             </a:fld>
             <a:endParaRPr/>
           </a:p>
@@ -4500,7 +4492,7 @@
           <a:lstStyle/>
           <a:p>
             <a:fld id="{0E1AB97B-D0C7-4CCB-8568-F47C13D538D5}" type="datetimeFigureOut">
-              <a:t>26-Sep-26</a:t>
+              <a:t>05-Oct-26</a:t>
             </a:fld>
             <a:endParaRPr/>
           </a:p>
@@ -4770,7 +4762,7 @@
           <a:lstStyle/>
           <a:p>
             <a:fld id="{0E1AB97B-D0C7-4CCB-8568-F47C13D538D5}" type="datetimeFigureOut">
-              <a:t>26-Sep-26</a:t>
+              <a:t>05-Oct-26</a:t>
             </a:fld>
             <a:endParaRPr/>
           </a:p>
@@ -5037,7 +5029,7 @@
           <a:lstStyle/>
           <a:p>
             <a:fld id="{0E1AB97B-D0C7-4CCB-8568-F47C13D538D5}" type="datetimeFigureOut">
-              <a:t>26-Sep-26</a:t>
+              <a:t>05-Oct-26</a:t>
             </a:fld>
             <a:endParaRPr/>
           </a:p>
@@ -5461,7 +5453,7 @@
           <a:lstStyle/>
           <a:p>
             <a:fld id="{0E1AB97B-D0C7-4CCB-8568-F47C13D538D5}" type="datetimeFigureOut">
-              <a:t>26-Sep-26</a:t>
+              <a:t>05-Oct-26</a:t>
             </a:fld>
             <a:endParaRPr/>
           </a:p>
@@ -5599,7 +5591,7 @@
           <a:lstStyle/>
           <a:p>
             <a:fld id="{0E1AB97B-D0C7-4CCB-8568-F47C13D538D5}" type="datetimeFigureOut">
-              <a:t>26-Sep-26</a:t>
+              <a:t>05-Oct-26</a:t>
             </a:fld>
             <a:endParaRPr/>
           </a:p>
@@ -5705,7 +5697,7 @@
           <a:lstStyle/>
           <a:p>
             <a:fld id="{0E1AB97B-D0C7-4CCB-8568-F47C13D538D5}" type="datetimeFigureOut">
-              <a:t>26-Sep-26</a:t>
+              <a:t>05-Oct-26</a:t>
             </a:fld>
             <a:endParaRPr/>
           </a:p>
@@ -5993,7 +5985,7 @@
           <a:lstStyle/>
           <a:p>
             <a:fld id="{0E1AB97B-D0C7-4CCB-8568-F47C13D538D5}" type="datetimeFigureOut">
-              <a:t>26-Sep-26</a:t>
+              <a:t>05-Oct-26</a:t>
             </a:fld>
             <a:endParaRPr/>
           </a:p>
@@ -6336,7 +6328,7 @@
           <a:lstStyle/>
           <a:p>
             <a:fld id="{0E1AB97B-D0C7-4CCB-8568-F47C13D538D5}" type="datetimeFigureOut">
-              <a:t>26-Sep-26</a:t>
+              <a:t>05-Oct-26</a:t>
             </a:fld>
             <a:endParaRPr/>
           </a:p>
@@ -7180,7 +7172,7 @@
           </a:lstStyle>
           <a:p>
             <a:fld id="{0E1AB97B-D0C7-4CCB-8568-F47C13D538D5}" type="datetimeFigureOut">
-              <a:t>26-Sep-26</a:t>
+              <a:t>05-Oct-26</a:t>
             </a:fld>
             <a:endParaRPr/>
           </a:p>
@@ -11471,7 +11463,7 @@
               </a:defRPr>
             </a:pPr>
             <a:r>
-              <a:rPr sz="1575" b="1">
+              <a:rPr sz="1575" b="1" dirty="0" err="1">
                 <a:solidFill>
                   <a:srgbClr val="18A7CC"/>
                 </a:solidFill>
@@ -11479,7 +11471,40 @@
                 <a:ea typeface="Trebuchet MS"/>
                 <a:cs typeface="Trebuchet MS"/>
               </a:rPr>
-              <a:t>Κάρτα δικτύου (NIC)</a:t>
+              <a:t>Κάρτ</a:t>
+            </a:r>
+            <a:r>
+              <a:rPr sz="1575" b="1" dirty="0">
+                <a:solidFill>
+                  <a:srgbClr val="18A7CC"/>
+                </a:solidFill>
+                <a:latin typeface="Trebuchet MS"/>
+                <a:ea typeface="Trebuchet MS"/>
+                <a:cs typeface="Trebuchet MS"/>
+              </a:rPr>
+              <a:t>α δικτύου (NIC</a:t>
+            </a:r>
+            <a:r>
+              <a:rPr lang="en-US" sz="1575" b="1" dirty="0">
+                <a:solidFill>
+                  <a:srgbClr val="18A7CC"/>
+                </a:solidFill>
+                <a:latin typeface="Trebuchet MS"/>
+                <a:ea typeface="Trebuchet MS"/>
+                <a:cs typeface="Trebuchet MS"/>
+              </a:rPr>
+              <a:t>=network interface card</a:t>
+            </a:r>
+            <a:r>
+              <a:rPr sz="1575" b="1" dirty="0">
+                <a:solidFill>
+                  <a:srgbClr val="18A7CC"/>
+                </a:solidFill>
+                <a:latin typeface="Trebuchet MS"/>
+                <a:ea typeface="Trebuchet MS"/>
+                <a:cs typeface="Trebuchet MS"/>
+              </a:rPr>
+              <a:t>)</a:t>
             </a:r>
           </a:p>
         </p:txBody>
@@ -11675,7 +11700,7 @@
               </a:defRPr>
             </a:pPr>
             <a:r>
-              <a:rPr sz="1650" b="0">
+              <a:rPr sz="1650" b="0" dirty="0" err="1">
                 <a:solidFill>
                   <a:srgbClr val="333333"/>
                 </a:solidFill>
@@ -11683,7 +11708,18 @@
                 <a:ea typeface="Trebuchet MS"/>
                 <a:cs typeface="Trebuchet MS"/>
               </a:rPr>
-              <a:t>Χρησιμοποιεί καλώδιο δικτύου και υποδοχή RJ45.</a:t>
+              <a:t>Χρησιμο</a:t>
+            </a:r>
+            <a:r>
+              <a:rPr sz="1650" b="0" dirty="0">
+                <a:solidFill>
+                  <a:srgbClr val="333333"/>
+                </a:solidFill>
+                <a:latin typeface="Trebuchet MS"/>
+                <a:ea typeface="Trebuchet MS"/>
+                <a:cs typeface="Trebuchet MS"/>
+              </a:rPr>
+              <a:t>ποιεί καλώδιο δικτύου και υποδοχή RJ45.</a:t>
             </a:r>
           </a:p>
         </p:txBody>
@@ -11789,7 +11825,7 @@
               </a:defRPr>
             </a:pPr>
             <a:r>
-              <a:rPr sz="1650" b="0">
+              <a:rPr sz="1650" b="0" dirty="0" err="1">
                 <a:solidFill>
                   <a:srgbClr val="333333"/>
                 </a:solidFill>
@@ -11797,7 +11833,18 @@
                 <a:ea typeface="Trebuchet MS"/>
                 <a:cs typeface="Trebuchet MS"/>
               </a:rPr>
-              <a:t>Χρησιμοποιεί ραδιοκύματα και κεραία για σύνδεση σε δίκτυο Wi-Fi.</a:t>
+              <a:t>Χρησιμο</a:t>
+            </a:r>
+            <a:r>
+              <a:rPr sz="1650" b="0" dirty="0">
+                <a:solidFill>
+                  <a:srgbClr val="333333"/>
+                </a:solidFill>
+                <a:latin typeface="Trebuchet MS"/>
+                <a:ea typeface="Trebuchet MS"/>
+                <a:cs typeface="Trebuchet MS"/>
+              </a:rPr>
+              <a:t>ποιεί ραδιοκύματα και κεραία για σύνδεση σε δίκτυο Wi-Fi.</a:t>
             </a:r>
           </a:p>
         </p:txBody>
